--- a/MSW-Praesentation.pptx
+++ b/MSW-Praesentation.pptx
@@ -5,7 +5,7 @@
     <p:sldMasterId id="2147483648" r:id="rId1"/>
   </p:sldMasterIdLst>
   <p:notesMasterIdLst>
-    <p:notesMasterId r:id="rId15"/>
+    <p:notesMasterId r:id="rId14"/>
   </p:notesMasterIdLst>
   <p:sldIdLst>
     <p:sldId id="256" r:id="rId2"/>
@@ -18,9 +18,8 @@
     <p:sldId id="258" r:id="rId9"/>
     <p:sldId id="259" r:id="rId10"/>
     <p:sldId id="262" r:id="rId11"/>
-    <p:sldId id="263" r:id="rId12"/>
-    <p:sldId id="264" r:id="rId13"/>
-    <p:sldId id="275" r:id="rId14"/>
+    <p:sldId id="264" r:id="rId12"/>
+    <p:sldId id="275" r:id="rId13"/>
   </p:sldIdLst>
   <p:sldSz cx="9144000" cy="5143500" type="screen16x9"/>
   <p:notesSz cx="5143500" cy="9144000"/>
@@ -122,6 +121,73 @@
     </p:ext>
   </p:extLst>
 </p:presentation>
+</file>
+
+<file path=ppt/changesInfos/changesInfo1.xml><?xml version="1.0" encoding="utf-8"?>
+<pc:chgInfo xmlns:a="http://schemas.openxmlformats.org/drawingml/2006/main" xmlns:r="http://schemas.openxmlformats.org/officeDocument/2006/relationships" xmlns:ac="http://schemas.microsoft.com/office/drawing/2013/main/command" xmlns:pc="http://schemas.microsoft.com/office/powerpoint/2013/main/command">
+  <pc:docChgLst>
+    <pc:chgData name="Öztürk Emirhan" userId="5c409597-c12f-4ca8-9edf-299bc2a0e0ee" providerId="ADAL" clId="{295B942B-C8B4-41A1-B6C2-8759009F6EEF}"/>
+    <pc:docChg chg="delSld modSld">
+      <pc:chgData name="Öztürk Emirhan" userId="5c409597-c12f-4ca8-9edf-299bc2a0e0ee" providerId="ADAL" clId="{295B942B-C8B4-41A1-B6C2-8759009F6EEF}" dt="2026-03-13T09:52:22.729" v="10" actId="2696"/>
+      <pc:docMkLst>
+        <pc:docMk/>
+      </pc:docMkLst>
+      <pc:sldChg chg="modSp mod">
+        <pc:chgData name="Öztürk Emirhan" userId="5c409597-c12f-4ca8-9edf-299bc2a0e0ee" providerId="ADAL" clId="{295B942B-C8B4-41A1-B6C2-8759009F6EEF}" dt="2026-03-13T09:52:01.557" v="9" actId="20577"/>
+        <pc:sldMkLst>
+          <pc:docMk/>
+          <pc:sldMk cId="0" sldId="258"/>
+        </pc:sldMkLst>
+        <pc:spChg chg="mod">
+          <ac:chgData name="Öztürk Emirhan" userId="5c409597-c12f-4ca8-9edf-299bc2a0e0ee" providerId="ADAL" clId="{295B942B-C8B4-41A1-B6C2-8759009F6EEF}" dt="2026-03-13T09:52:01.557" v="9" actId="20577"/>
+          <ac:spMkLst>
+            <pc:docMk/>
+            <pc:sldMk cId="0" sldId="258"/>
+            <ac:spMk id="11" creationId="{00000000-0000-0000-0000-000000000000}"/>
+          </ac:spMkLst>
+        </pc:spChg>
+      </pc:sldChg>
+      <pc:sldChg chg="del">
+        <pc:chgData name="Öztürk Emirhan" userId="5c409597-c12f-4ca8-9edf-299bc2a0e0ee" providerId="ADAL" clId="{295B942B-C8B4-41A1-B6C2-8759009F6EEF}" dt="2026-03-13T09:52:22.729" v="10" actId="2696"/>
+        <pc:sldMkLst>
+          <pc:docMk/>
+          <pc:sldMk cId="0" sldId="263"/>
+        </pc:sldMkLst>
+      </pc:sldChg>
+      <pc:sldChg chg="modSp mod">
+        <pc:chgData name="Öztürk Emirhan" userId="5c409597-c12f-4ca8-9edf-299bc2a0e0ee" providerId="ADAL" clId="{295B942B-C8B4-41A1-B6C2-8759009F6EEF}" dt="2026-03-13T09:51:41.967" v="7" actId="20577"/>
+        <pc:sldMkLst>
+          <pc:docMk/>
+          <pc:sldMk cId="0" sldId="273"/>
+        </pc:sldMkLst>
+        <pc:spChg chg="mod">
+          <ac:chgData name="Öztürk Emirhan" userId="5c409597-c12f-4ca8-9edf-299bc2a0e0ee" providerId="ADAL" clId="{295B942B-C8B4-41A1-B6C2-8759009F6EEF}" dt="2026-03-13T09:51:41.967" v="7" actId="20577"/>
+          <ac:spMkLst>
+            <pc:docMk/>
+            <pc:sldMk cId="0" sldId="273"/>
+            <ac:spMk id="3" creationId="{00000000-0000-0000-0000-000000000000}"/>
+          </ac:spMkLst>
+        </pc:spChg>
+        <pc:spChg chg="mod">
+          <ac:chgData name="Öztürk Emirhan" userId="5c409597-c12f-4ca8-9edf-299bc2a0e0ee" providerId="ADAL" clId="{295B942B-C8B4-41A1-B6C2-8759009F6EEF}" dt="2026-03-13T09:51:30.524" v="1" actId="20577"/>
+          <ac:spMkLst>
+            <pc:docMk/>
+            <pc:sldMk cId="0" sldId="273"/>
+            <ac:spMk id="12" creationId="{00000000-0000-0000-0000-000000000000}"/>
+          </ac:spMkLst>
+        </pc:spChg>
+        <pc:spChg chg="mod">
+          <ac:chgData name="Öztürk Emirhan" userId="5c409597-c12f-4ca8-9edf-299bc2a0e0ee" providerId="ADAL" clId="{295B942B-C8B4-41A1-B6C2-8759009F6EEF}" dt="2026-03-13T09:51:32.779" v="3" actId="20577"/>
+          <ac:spMkLst>
+            <pc:docMk/>
+            <pc:sldMk cId="0" sldId="273"/>
+            <ac:spMk id="15" creationId="{00000000-0000-0000-0000-000000000000}"/>
+          </ac:spMkLst>
+        </pc:spChg>
+      </pc:sldChg>
+    </pc:docChg>
+  </pc:docChgLst>
+</pc:chgInfo>
 </file>
 
 <file path=ppt/notesMasters/notesMaster1.xml><?xml version="1.0" encoding="utf-8"?>
@@ -422,90 +488,6 @@
   <p:cSld>
     <p:spTree>
       <p:nvGrpSpPr>
-        <p:cNvPr id="1" name=""/>
-        <p:cNvGrpSpPr/>
-        <p:nvPr/>
-      </p:nvGrpSpPr>
-      <p:grpSpPr>
-        <a:xfrm>
-          <a:off x="0" y="0"/>
-          <a:ext cx="0" cy="0"/>
-          <a:chOff x="0" y="0"/>
-          <a:chExt cx="0" cy="0"/>
-        </a:xfrm>
-      </p:grpSpPr>
-      <p:sp>
-        <p:nvSpPr>
-          <p:cNvPr id="2" name="Slide Image Placeholder 1"/>
-          <p:cNvSpPr>
-            <a:spLocks noGrp="1" noRot="1" noChangeAspect="1"/>
-          </p:cNvSpPr>
-          <p:nvPr>
-            <p:ph type="sldImg"/>
-          </p:nvPr>
-        </p:nvSpPr>
-        <p:spPr/>
-      </p:sp>
-      <p:sp>
-        <p:nvSpPr>
-          <p:cNvPr id="3" name="Notes Placeholder 2"/>
-          <p:cNvSpPr>
-            <a:spLocks noGrp="1"/>
-          </p:cNvSpPr>
-          <p:nvPr>
-            <p:ph type="body" idx="1"/>
-          </p:nvPr>
-        </p:nvSpPr>
-        <p:spPr/>
-        <p:txBody>
-          <a:bodyPr/>
-          <a:lstStyle/>
-          <a:p>
-            <a:endParaRPr lang="en-US" dirty="0"/>
-          </a:p>
-        </p:txBody>
-      </p:sp>
-      <p:sp>
-        <p:nvSpPr>
-          <p:cNvPr id="4" name="Slide Number Placeholder 3"/>
-          <p:cNvSpPr>
-            <a:spLocks noGrp="1"/>
-          </p:cNvSpPr>
-          <p:nvPr>
-            <p:ph type="sldNum" sz="quarter" idx="10"/>
-          </p:nvPr>
-        </p:nvSpPr>
-        <p:spPr/>
-        <p:txBody>
-          <a:bodyPr/>
-          <a:lstStyle/>
-          <a:p>
-            <a:fld id="{F7021451-1387-4CA6-816F-3879F97B5CBC}" type="slidenum">
-              <a:rPr lang="en-US"/>
-              <a:t>12</a:t>
-            </a:fld>
-            <a:endParaRPr lang="en-US"/>
-          </a:p>
-        </p:txBody>
-      </p:sp>
-    </p:spTree>
-    <p:extLst>
-      <p:ext uri="{BB962C8B-B14F-4D97-AF65-F5344CB8AC3E}">
-        <p14:creationId xmlns:p14="http://schemas.microsoft.com/office/powerpoint/2010/main" val="1024086991"/>
-      </p:ext>
-    </p:extLst>
-  </p:cSld>
-  <p:clrMapOvr>
-    <a:masterClrMapping/>
-  </p:clrMapOvr>
-</p:notes>
-</file>
-
-<file path=ppt/notesSlides/notesSlide12.xml><?xml version="1.0" encoding="utf-8"?>
-<p:notes xmlns:a="http://schemas.openxmlformats.org/drawingml/2006/main" xmlns:r="http://schemas.openxmlformats.org/officeDocument/2006/relationships" xmlns:p="http://schemas.openxmlformats.org/presentationml/2006/main">
-  <p:cSld>
-    <p:spTree>
-      <p:nvGrpSpPr>
         <p:cNvPr id="1" name="">
           <a:extLst>
             <a:ext uri="{FF2B5EF4-FFF2-40B4-BE49-F238E27FC236}">
@@ -590,7 +572,7 @@
           <a:p>
             <a:fld id="{F7021451-1387-4CA6-816F-3879F97B5CBC}" type="slidenum">
               <a:rPr lang="en-US"/>
-              <a:t>13</a:t>
+              <a:t>12</a:t>
             </a:fld>
             <a:endParaRPr lang="en-US"/>
           </a:p>
@@ -2332,936 +2314,6 @@
 
 <file path=ppt/slides/slide11.xml><?xml version="1.0" encoding="utf-8"?>
 <p:sld xmlns:a="http://schemas.openxmlformats.org/drawingml/2006/main" xmlns:r="http://schemas.openxmlformats.org/officeDocument/2006/relationships" xmlns:p="http://schemas.openxmlformats.org/presentationml/2006/main">
-  <p:cSld name="Slide 8">
-    <p:bg>
-      <p:bgPr>
-        <a:solidFill>
-          <a:srgbClr val="1E2030"/>
-        </a:solidFill>
-        <a:effectLst/>
-      </p:bgPr>
-    </p:bg>
-    <p:spTree>
-      <p:nvGrpSpPr>
-        <p:cNvPr id="1" name=""/>
-        <p:cNvGrpSpPr/>
-        <p:nvPr/>
-      </p:nvGrpSpPr>
-      <p:grpSpPr>
-        <a:xfrm>
-          <a:off x="0" y="0"/>
-          <a:ext cx="0" cy="0"/>
-          <a:chOff x="0" y="0"/>
-          <a:chExt cx="0" cy="0"/>
-        </a:xfrm>
-      </p:grpSpPr>
-      <p:sp>
-        <p:nvSpPr>
-          <p:cNvPr id="2" name="Text 0"/>
-          <p:cNvSpPr/>
-          <p:nvPr/>
-        </p:nvSpPr>
-        <p:spPr>
-          <a:xfrm>
-            <a:off x="548640" y="228600"/>
-            <a:ext cx="8229600" cy="502920"/>
-          </a:xfrm>
-          <a:prstGeom prst="rect">
-            <a:avLst/>
-          </a:prstGeom>
-          <a:noFill/>
-          <a:ln/>
-        </p:spPr>
-        <p:txBody>
-          <a:bodyPr wrap="square" rtlCol="0" anchor="ctr"/>
-          <a:lstStyle/>
-          <a:p>
-            <a:pPr marL="0" indent="0">
-              <a:buNone/>
-            </a:pPr>
-            <a:r>
-              <a:rPr lang="en-US" sz="2400" b="1" dirty="0">
-                <a:solidFill>
-                  <a:srgbClr val="FFFFFF"/>
-                </a:solidFill>
-                <a:latin typeface="Trebuchet MS" pitchFamily="34" charset="0"/>
-                <a:ea typeface="Trebuchet MS" pitchFamily="34" charset="-122"/>
-                <a:cs typeface="Trebuchet MS" pitchFamily="34" charset="-120"/>
-              </a:rPr>
-              <a:t>Unsere Tests</a:t>
-            </a:r>
-            <a:endParaRPr lang="en-US" sz="2400" dirty="0"/>
-          </a:p>
-        </p:txBody>
-      </p:sp>
-      <p:sp>
-        <p:nvSpPr>
-          <p:cNvPr id="3" name="Shape 1"/>
-          <p:cNvSpPr/>
-          <p:nvPr/>
-        </p:nvSpPr>
-        <p:spPr>
-          <a:xfrm>
-            <a:off x="457200" y="960120"/>
-            <a:ext cx="8229600" cy="457200"/>
-          </a:xfrm>
-          <a:prstGeom prst="rect">
-            <a:avLst/>
-          </a:prstGeom>
-          <a:solidFill>
-            <a:srgbClr val="2B2E44"/>
-          </a:solidFill>
-          <a:ln/>
-        </p:spPr>
-        <p:txBody>
-          <a:bodyPr/>
-          <a:lstStyle/>
-          <a:p>
-            <a:endParaRPr lang="de-AT"/>
-          </a:p>
-        </p:txBody>
-      </p:sp>
-      <p:sp>
-        <p:nvSpPr>
-          <p:cNvPr id="4" name="Shape 2"/>
-          <p:cNvSpPr/>
-          <p:nvPr/>
-        </p:nvSpPr>
-        <p:spPr>
-          <a:xfrm>
-            <a:off x="640080" y="1051560"/>
-            <a:ext cx="548640" cy="274320"/>
-          </a:xfrm>
-          <a:prstGeom prst="rect">
-            <a:avLst/>
-          </a:prstGeom>
-          <a:solidFill>
-            <a:srgbClr val="94A3B8"/>
-          </a:solidFill>
-          <a:ln/>
-        </p:spPr>
-        <p:txBody>
-          <a:bodyPr/>
-          <a:lstStyle/>
-          <a:p>
-            <a:endParaRPr lang="de-AT"/>
-          </a:p>
-        </p:txBody>
-      </p:sp>
-      <p:sp>
-        <p:nvSpPr>
-          <p:cNvPr id="5" name="Text 3"/>
-          <p:cNvSpPr/>
-          <p:nvPr/>
-        </p:nvSpPr>
-        <p:spPr>
-          <a:xfrm>
-            <a:off x="640080" y="1051560"/>
-            <a:ext cx="548640" cy="274320"/>
-          </a:xfrm>
-          <a:prstGeom prst="rect">
-            <a:avLst/>
-          </a:prstGeom>
-          <a:noFill/>
-          <a:ln/>
-        </p:spPr>
-        <p:txBody>
-          <a:bodyPr wrap="square" rtlCol="0" anchor="ctr"/>
-          <a:lstStyle/>
-          <a:p>
-            <a:pPr marL="0" indent="0" algn="ctr">
-              <a:buNone/>
-            </a:pPr>
-            <a:r>
-              <a:rPr lang="en-US" sz="1000" b="1" dirty="0">
-                <a:solidFill>
-                  <a:srgbClr val="FFFFFF"/>
-                </a:solidFill>
-                <a:latin typeface="Calibri" pitchFamily="34" charset="0"/>
-                <a:ea typeface="Calibri" pitchFamily="34" charset="-122"/>
-                <a:cs typeface="Calibri" pitchFamily="34" charset="-120"/>
-              </a:rPr>
-              <a:t>UI</a:t>
-            </a:r>
-            <a:endParaRPr lang="en-US" sz="1000" dirty="0"/>
-          </a:p>
-        </p:txBody>
-      </p:sp>
-      <p:sp>
-        <p:nvSpPr>
-          <p:cNvPr id="6" name="Text 4"/>
-          <p:cNvSpPr/>
-          <p:nvPr/>
-        </p:nvSpPr>
-        <p:spPr>
-          <a:xfrm>
-            <a:off x="1371600" y="960120"/>
-            <a:ext cx="7132320" cy="457200"/>
-          </a:xfrm>
-          <a:prstGeom prst="rect">
-            <a:avLst/>
-          </a:prstGeom>
-          <a:noFill/>
-          <a:ln/>
-        </p:spPr>
-        <p:txBody>
-          <a:bodyPr wrap="square" lIns="0" tIns="0" rIns="0" bIns="0" rtlCol="0" anchor="ctr"/>
-          <a:lstStyle/>
-          <a:p>
-            <a:pPr marL="0" indent="0">
-              <a:buNone/>
-            </a:pPr>
-            <a:r>
-              <a:rPr lang="en-US" sz="1300" dirty="0">
-                <a:solidFill>
-                  <a:srgbClr val="E2E8F0"/>
-                </a:solidFill>
-                <a:latin typeface="Calibri" pitchFamily="34" charset="0"/>
-                <a:ea typeface="Calibri" pitchFamily="34" charset="-122"/>
-                <a:cs typeface="Calibri" pitchFamily="34" charset="-120"/>
-              </a:rPr>
-              <a:t>✓  zeigt Ladeindikator während des Fetch</a:t>
-            </a:r>
-            <a:endParaRPr lang="en-US" sz="1300" dirty="0"/>
-          </a:p>
-        </p:txBody>
-      </p:sp>
-      <p:sp>
-        <p:nvSpPr>
-          <p:cNvPr id="7" name="Shape 5"/>
-          <p:cNvSpPr/>
-          <p:nvPr/>
-        </p:nvSpPr>
-        <p:spPr>
-          <a:xfrm>
-            <a:off x="457200" y="1554480"/>
-            <a:ext cx="8229600" cy="457200"/>
-          </a:xfrm>
-          <a:prstGeom prst="rect">
-            <a:avLst/>
-          </a:prstGeom>
-          <a:solidFill>
-            <a:srgbClr val="2B2E44"/>
-          </a:solidFill>
-          <a:ln/>
-        </p:spPr>
-        <p:txBody>
-          <a:bodyPr/>
-          <a:lstStyle/>
-          <a:p>
-            <a:endParaRPr lang="de-AT"/>
-          </a:p>
-        </p:txBody>
-      </p:sp>
-      <p:sp>
-        <p:nvSpPr>
-          <p:cNvPr id="8" name="Shape 6"/>
-          <p:cNvSpPr/>
-          <p:nvPr/>
-        </p:nvSpPr>
-        <p:spPr>
-          <a:xfrm>
-            <a:off x="640080" y="1645920"/>
-            <a:ext cx="548640" cy="274320"/>
-          </a:xfrm>
-          <a:prstGeom prst="rect">
-            <a:avLst/>
-          </a:prstGeom>
-          <a:solidFill>
-            <a:srgbClr val="4ADE80"/>
-          </a:solidFill>
-          <a:ln/>
-        </p:spPr>
-        <p:txBody>
-          <a:bodyPr/>
-          <a:lstStyle/>
-          <a:p>
-            <a:endParaRPr lang="de-AT"/>
-          </a:p>
-        </p:txBody>
-      </p:sp>
-      <p:sp>
-        <p:nvSpPr>
-          <p:cNvPr id="9" name="Text 7"/>
-          <p:cNvSpPr/>
-          <p:nvPr/>
-        </p:nvSpPr>
-        <p:spPr>
-          <a:xfrm>
-            <a:off x="640080" y="1645920"/>
-            <a:ext cx="548640" cy="274320"/>
-          </a:xfrm>
-          <a:prstGeom prst="rect">
-            <a:avLst/>
-          </a:prstGeom>
-          <a:noFill/>
-          <a:ln/>
-        </p:spPr>
-        <p:txBody>
-          <a:bodyPr wrap="square" rtlCol="0" anchor="ctr"/>
-          <a:lstStyle/>
-          <a:p>
-            <a:pPr marL="0" indent="0" algn="ctr">
-              <a:buNone/>
-            </a:pPr>
-            <a:r>
-              <a:rPr lang="en-US" sz="1000" b="1" dirty="0">
-                <a:solidFill>
-                  <a:srgbClr val="FFFFFF"/>
-                </a:solidFill>
-                <a:latin typeface="Calibri" pitchFamily="34" charset="0"/>
-                <a:ea typeface="Calibri" pitchFamily="34" charset="-122"/>
-                <a:cs typeface="Calibri" pitchFamily="34" charset="-120"/>
-              </a:rPr>
-              <a:t>200</a:t>
-            </a:r>
-            <a:endParaRPr lang="en-US" sz="1000" dirty="0"/>
-          </a:p>
-        </p:txBody>
-      </p:sp>
-      <p:sp>
-        <p:nvSpPr>
-          <p:cNvPr id="10" name="Text 8"/>
-          <p:cNvSpPr/>
-          <p:nvPr/>
-        </p:nvSpPr>
-        <p:spPr>
-          <a:xfrm>
-            <a:off x="1371600" y="1554480"/>
-            <a:ext cx="7132320" cy="457200"/>
-          </a:xfrm>
-          <a:prstGeom prst="rect">
-            <a:avLst/>
-          </a:prstGeom>
-          <a:noFill/>
-          <a:ln/>
-        </p:spPr>
-        <p:txBody>
-          <a:bodyPr wrap="square" lIns="0" tIns="0" rIns="0" bIns="0" rtlCol="0" anchor="ctr"/>
-          <a:lstStyle/>
-          <a:p>
-            <a:pPr marL="0" indent="0">
-              <a:buNone/>
-            </a:pPr>
-            <a:r>
-              <a:rPr lang="en-US" sz="1300" dirty="0">
-                <a:solidFill>
-                  <a:srgbClr val="E2E8F0"/>
-                </a:solidFill>
-                <a:latin typeface="Calibri" pitchFamily="34" charset="0"/>
-                <a:ea typeface="Calibri" pitchFamily="34" charset="-122"/>
-                <a:cs typeface="Calibri" pitchFamily="34" charset="-120"/>
-              </a:rPr>
-              <a:t>✓  zeigt Produkte bei erfolgreicher API-Antwort</a:t>
-            </a:r>
-            <a:endParaRPr lang="en-US" sz="1300" dirty="0"/>
-          </a:p>
-        </p:txBody>
-      </p:sp>
-      <p:sp>
-        <p:nvSpPr>
-          <p:cNvPr id="11" name="Shape 9"/>
-          <p:cNvSpPr/>
-          <p:nvPr/>
-        </p:nvSpPr>
-        <p:spPr>
-          <a:xfrm>
-            <a:off x="457200" y="2148840"/>
-            <a:ext cx="8229600" cy="457200"/>
-          </a:xfrm>
-          <a:prstGeom prst="rect">
-            <a:avLst/>
-          </a:prstGeom>
-          <a:solidFill>
-            <a:srgbClr val="2B2E44"/>
-          </a:solidFill>
-          <a:ln/>
-        </p:spPr>
-        <p:txBody>
-          <a:bodyPr/>
-          <a:lstStyle/>
-          <a:p>
-            <a:endParaRPr lang="de-AT"/>
-          </a:p>
-        </p:txBody>
-      </p:sp>
-      <p:sp>
-        <p:nvSpPr>
-          <p:cNvPr id="12" name="Shape 10"/>
-          <p:cNvSpPr/>
-          <p:nvPr/>
-        </p:nvSpPr>
-        <p:spPr>
-          <a:xfrm>
-            <a:off x="640080" y="2240280"/>
-            <a:ext cx="548640" cy="274320"/>
-          </a:xfrm>
-          <a:prstGeom prst="rect">
-            <a:avLst/>
-          </a:prstGeom>
-          <a:solidFill>
-            <a:srgbClr val="4ADE80"/>
-          </a:solidFill>
-          <a:ln/>
-        </p:spPr>
-        <p:txBody>
-          <a:bodyPr/>
-          <a:lstStyle/>
-          <a:p>
-            <a:endParaRPr lang="de-AT"/>
-          </a:p>
-        </p:txBody>
-      </p:sp>
-      <p:sp>
-        <p:nvSpPr>
-          <p:cNvPr id="13" name="Text 11"/>
-          <p:cNvSpPr/>
-          <p:nvPr/>
-        </p:nvSpPr>
-        <p:spPr>
-          <a:xfrm>
-            <a:off x="640080" y="2240280"/>
-            <a:ext cx="548640" cy="274320"/>
-          </a:xfrm>
-          <a:prstGeom prst="rect">
-            <a:avLst/>
-          </a:prstGeom>
-          <a:noFill/>
-          <a:ln/>
-        </p:spPr>
-        <p:txBody>
-          <a:bodyPr wrap="square" rtlCol="0" anchor="ctr"/>
-          <a:lstStyle/>
-          <a:p>
-            <a:pPr marL="0" indent="0" algn="ctr">
-              <a:buNone/>
-            </a:pPr>
-            <a:r>
-              <a:rPr lang="en-US" sz="1000" b="1" dirty="0">
-                <a:solidFill>
-                  <a:srgbClr val="FFFFFF"/>
-                </a:solidFill>
-                <a:latin typeface="Calibri" pitchFamily="34" charset="0"/>
-                <a:ea typeface="Calibri" pitchFamily="34" charset="-122"/>
-                <a:cs typeface="Calibri" pitchFamily="34" charset="-120"/>
-              </a:rPr>
-              <a:t>200</a:t>
-            </a:r>
-            <a:endParaRPr lang="en-US" sz="1000" dirty="0"/>
-          </a:p>
-        </p:txBody>
-      </p:sp>
-      <p:sp>
-        <p:nvSpPr>
-          <p:cNvPr id="14" name="Text 12"/>
-          <p:cNvSpPr/>
-          <p:nvPr/>
-        </p:nvSpPr>
-        <p:spPr>
-          <a:xfrm>
-            <a:off x="1371600" y="2148840"/>
-            <a:ext cx="7132320" cy="457200"/>
-          </a:xfrm>
-          <a:prstGeom prst="rect">
-            <a:avLst/>
-          </a:prstGeom>
-          <a:noFill/>
-          <a:ln/>
-        </p:spPr>
-        <p:txBody>
-          <a:bodyPr wrap="square" lIns="0" tIns="0" rIns="0" bIns="0" rtlCol="0" anchor="ctr"/>
-          <a:lstStyle/>
-          <a:p>
-            <a:pPr marL="0" indent="0">
-              <a:buNone/>
-            </a:pPr>
-            <a:r>
-              <a:rPr lang="en-US" sz="1300" dirty="0">
-                <a:solidFill>
-                  <a:srgbClr val="E2E8F0"/>
-                </a:solidFill>
-                <a:latin typeface="Calibri" pitchFamily="34" charset="0"/>
-                <a:ea typeface="Calibri" pitchFamily="34" charset="-122"/>
-                <a:cs typeface="Calibri" pitchFamily="34" charset="-120"/>
-              </a:rPr>
-              <a:t>✓  zeigt Preise korrekt formatiert an</a:t>
-            </a:r>
-            <a:endParaRPr lang="en-US" sz="1300" dirty="0"/>
-          </a:p>
-        </p:txBody>
-      </p:sp>
-      <p:sp>
-        <p:nvSpPr>
-          <p:cNvPr id="15" name="Shape 13"/>
-          <p:cNvSpPr/>
-          <p:nvPr/>
-        </p:nvSpPr>
-        <p:spPr>
-          <a:xfrm>
-            <a:off x="457200" y="2743200"/>
-            <a:ext cx="8229600" cy="457200"/>
-          </a:xfrm>
-          <a:prstGeom prst="rect">
-            <a:avLst/>
-          </a:prstGeom>
-          <a:solidFill>
-            <a:srgbClr val="2B2E44"/>
-          </a:solidFill>
-          <a:ln/>
-        </p:spPr>
-        <p:txBody>
-          <a:bodyPr/>
-          <a:lstStyle/>
-          <a:p>
-            <a:endParaRPr lang="de-AT"/>
-          </a:p>
-        </p:txBody>
-      </p:sp>
-      <p:sp>
-        <p:nvSpPr>
-          <p:cNvPr id="16" name="Shape 14"/>
-          <p:cNvSpPr/>
-          <p:nvPr/>
-        </p:nvSpPr>
-        <p:spPr>
-          <a:xfrm>
-            <a:off x="640080" y="2834640"/>
-            <a:ext cx="548640" cy="274320"/>
-          </a:xfrm>
-          <a:prstGeom prst="rect">
-            <a:avLst/>
-          </a:prstGeom>
-          <a:solidFill>
-            <a:srgbClr val="4ADE80"/>
-          </a:solidFill>
-          <a:ln/>
-        </p:spPr>
-        <p:txBody>
-          <a:bodyPr/>
-          <a:lstStyle/>
-          <a:p>
-            <a:endParaRPr lang="de-AT"/>
-          </a:p>
-        </p:txBody>
-      </p:sp>
-      <p:sp>
-        <p:nvSpPr>
-          <p:cNvPr id="17" name="Text 15"/>
-          <p:cNvSpPr/>
-          <p:nvPr/>
-        </p:nvSpPr>
-        <p:spPr>
-          <a:xfrm>
-            <a:off x="640080" y="2834640"/>
-            <a:ext cx="548640" cy="274320"/>
-          </a:xfrm>
-          <a:prstGeom prst="rect">
-            <a:avLst/>
-          </a:prstGeom>
-          <a:noFill/>
-          <a:ln/>
-        </p:spPr>
-        <p:txBody>
-          <a:bodyPr wrap="square" rtlCol="0" anchor="ctr"/>
-          <a:lstStyle/>
-          <a:p>
-            <a:pPr marL="0" indent="0" algn="ctr">
-              <a:buNone/>
-            </a:pPr>
-            <a:r>
-              <a:rPr lang="en-US" sz="1000" b="1" dirty="0">
-                <a:solidFill>
-                  <a:srgbClr val="FFFFFF"/>
-                </a:solidFill>
-                <a:latin typeface="Calibri" pitchFamily="34" charset="0"/>
-                <a:ea typeface="Calibri" pitchFamily="34" charset="-122"/>
-                <a:cs typeface="Calibri" pitchFamily="34" charset="-120"/>
-              </a:rPr>
-              <a:t>200</a:t>
-            </a:r>
-            <a:endParaRPr lang="en-US" sz="1000" dirty="0"/>
-          </a:p>
-        </p:txBody>
-      </p:sp>
-      <p:sp>
-        <p:nvSpPr>
-          <p:cNvPr id="18" name="Text 16"/>
-          <p:cNvSpPr/>
-          <p:nvPr/>
-        </p:nvSpPr>
-        <p:spPr>
-          <a:xfrm>
-            <a:off x="1371600" y="2743200"/>
-            <a:ext cx="7132320" cy="457200"/>
-          </a:xfrm>
-          <a:prstGeom prst="rect">
-            <a:avLst/>
-          </a:prstGeom>
-          <a:noFill/>
-          <a:ln/>
-        </p:spPr>
-        <p:txBody>
-          <a:bodyPr wrap="square" lIns="0" tIns="0" rIns="0" bIns="0" rtlCol="0" anchor="ctr"/>
-          <a:lstStyle/>
-          <a:p>
-            <a:pPr marL="0" indent="0">
-              <a:buNone/>
-            </a:pPr>
-            <a:r>
-              <a:rPr lang="en-US" sz="1300" dirty="0">
-                <a:solidFill>
-                  <a:srgbClr val="E2E8F0"/>
-                </a:solidFill>
-                <a:latin typeface="Calibri" pitchFamily="34" charset="0"/>
-                <a:ea typeface="Calibri" pitchFamily="34" charset="-122"/>
-                <a:cs typeface="Calibri" pitchFamily="34" charset="-120"/>
-              </a:rPr>
-              <a:t>✓  zeigt Verfügbarkeit korrekt an</a:t>
-            </a:r>
-            <a:endParaRPr lang="en-US" sz="1300" dirty="0"/>
-          </a:p>
-        </p:txBody>
-      </p:sp>
-      <p:sp>
-        <p:nvSpPr>
-          <p:cNvPr id="19" name="Shape 17"/>
-          <p:cNvSpPr/>
-          <p:nvPr/>
-        </p:nvSpPr>
-        <p:spPr>
-          <a:xfrm>
-            <a:off x="457200" y="3337560"/>
-            <a:ext cx="8229600" cy="457200"/>
-          </a:xfrm>
-          <a:prstGeom prst="rect">
-            <a:avLst/>
-          </a:prstGeom>
-          <a:solidFill>
-            <a:srgbClr val="2B2E44"/>
-          </a:solidFill>
-          <a:ln/>
-        </p:spPr>
-        <p:txBody>
-          <a:bodyPr/>
-          <a:lstStyle/>
-          <a:p>
-            <a:endParaRPr lang="de-AT"/>
-          </a:p>
-        </p:txBody>
-      </p:sp>
-      <p:sp>
-        <p:nvSpPr>
-          <p:cNvPr id="20" name="Shape 18"/>
-          <p:cNvSpPr/>
-          <p:nvPr/>
-        </p:nvSpPr>
-        <p:spPr>
-          <a:xfrm>
-            <a:off x="640080" y="3429000"/>
-            <a:ext cx="548640" cy="274320"/>
-          </a:xfrm>
-          <a:prstGeom prst="rect">
-            <a:avLst/>
-          </a:prstGeom>
-          <a:solidFill>
-            <a:srgbClr val="F87171"/>
-          </a:solidFill>
-          <a:ln/>
-        </p:spPr>
-        <p:txBody>
-          <a:bodyPr/>
-          <a:lstStyle/>
-          <a:p>
-            <a:endParaRPr lang="de-AT"/>
-          </a:p>
-        </p:txBody>
-      </p:sp>
-      <p:sp>
-        <p:nvSpPr>
-          <p:cNvPr id="21" name="Text 19"/>
-          <p:cNvSpPr/>
-          <p:nvPr/>
-        </p:nvSpPr>
-        <p:spPr>
-          <a:xfrm>
-            <a:off x="640080" y="3429000"/>
-            <a:ext cx="548640" cy="274320"/>
-          </a:xfrm>
-          <a:prstGeom prst="rect">
-            <a:avLst/>
-          </a:prstGeom>
-          <a:noFill/>
-          <a:ln/>
-        </p:spPr>
-        <p:txBody>
-          <a:bodyPr wrap="square" rtlCol="0" anchor="ctr"/>
-          <a:lstStyle/>
-          <a:p>
-            <a:pPr marL="0" indent="0" algn="ctr">
-              <a:buNone/>
-            </a:pPr>
-            <a:r>
-              <a:rPr lang="en-US" sz="1000" b="1" dirty="0">
-                <a:solidFill>
-                  <a:srgbClr val="FFFFFF"/>
-                </a:solidFill>
-                <a:latin typeface="Calibri" pitchFamily="34" charset="0"/>
-                <a:ea typeface="Calibri" pitchFamily="34" charset="-122"/>
-                <a:cs typeface="Calibri" pitchFamily="34" charset="-120"/>
-              </a:rPr>
-              <a:t>500</a:t>
-            </a:r>
-            <a:endParaRPr lang="en-US" sz="1000" dirty="0"/>
-          </a:p>
-        </p:txBody>
-      </p:sp>
-      <p:sp>
-        <p:nvSpPr>
-          <p:cNvPr id="22" name="Text 20"/>
-          <p:cNvSpPr/>
-          <p:nvPr/>
-        </p:nvSpPr>
-        <p:spPr>
-          <a:xfrm>
-            <a:off x="1371600" y="3337560"/>
-            <a:ext cx="7132320" cy="457200"/>
-          </a:xfrm>
-          <a:prstGeom prst="rect">
-            <a:avLst/>
-          </a:prstGeom>
-          <a:noFill/>
-          <a:ln/>
-        </p:spPr>
-        <p:txBody>
-          <a:bodyPr wrap="square" lIns="0" tIns="0" rIns="0" bIns="0" rtlCol="0" anchor="ctr"/>
-          <a:lstStyle/>
-          <a:p>
-            <a:pPr marL="0" indent="0">
-              <a:buNone/>
-            </a:pPr>
-            <a:r>
-              <a:rPr lang="en-US" sz="1300" dirty="0">
-                <a:solidFill>
-                  <a:srgbClr val="E2E8F0"/>
-                </a:solidFill>
-                <a:latin typeface="Calibri" pitchFamily="34" charset="0"/>
-                <a:ea typeface="Calibri" pitchFamily="34" charset="-122"/>
-                <a:cs typeface="Calibri" pitchFamily="34" charset="-120"/>
-              </a:rPr>
-              <a:t>✓  zeigt Fehlermeldung bei 500 Internal Server Error</a:t>
-            </a:r>
-            <a:endParaRPr lang="en-US" sz="1300" dirty="0"/>
-          </a:p>
-        </p:txBody>
-      </p:sp>
-      <p:sp>
-        <p:nvSpPr>
-          <p:cNvPr id="23" name="Shape 21"/>
-          <p:cNvSpPr/>
-          <p:nvPr/>
-        </p:nvSpPr>
-        <p:spPr>
-          <a:xfrm>
-            <a:off x="457200" y="3931920"/>
-            <a:ext cx="8229600" cy="457200"/>
-          </a:xfrm>
-          <a:prstGeom prst="rect">
-            <a:avLst/>
-          </a:prstGeom>
-          <a:solidFill>
-            <a:srgbClr val="2B2E44"/>
-          </a:solidFill>
-          <a:ln/>
-        </p:spPr>
-        <p:txBody>
-          <a:bodyPr/>
-          <a:lstStyle/>
-          <a:p>
-            <a:endParaRPr lang="de-AT"/>
-          </a:p>
-        </p:txBody>
-      </p:sp>
-      <p:sp>
-        <p:nvSpPr>
-          <p:cNvPr id="24" name="Shape 22"/>
-          <p:cNvSpPr/>
-          <p:nvPr/>
-        </p:nvSpPr>
-        <p:spPr>
-          <a:xfrm>
-            <a:off x="640080" y="4023360"/>
-            <a:ext cx="548640" cy="274320"/>
-          </a:xfrm>
-          <a:prstGeom prst="rect">
-            <a:avLst/>
-          </a:prstGeom>
-          <a:solidFill>
-            <a:srgbClr val="F87171"/>
-          </a:solidFill>
-          <a:ln/>
-        </p:spPr>
-        <p:txBody>
-          <a:bodyPr/>
-          <a:lstStyle/>
-          <a:p>
-            <a:endParaRPr lang="de-AT"/>
-          </a:p>
-        </p:txBody>
-      </p:sp>
-      <p:sp>
-        <p:nvSpPr>
-          <p:cNvPr id="25" name="Text 23"/>
-          <p:cNvSpPr/>
-          <p:nvPr/>
-        </p:nvSpPr>
-        <p:spPr>
-          <a:xfrm>
-            <a:off x="640080" y="4023360"/>
-            <a:ext cx="548640" cy="274320"/>
-          </a:xfrm>
-          <a:prstGeom prst="rect">
-            <a:avLst/>
-          </a:prstGeom>
-          <a:noFill/>
-          <a:ln/>
-        </p:spPr>
-        <p:txBody>
-          <a:bodyPr wrap="square" rtlCol="0" anchor="ctr"/>
-          <a:lstStyle/>
-          <a:p>
-            <a:pPr marL="0" indent="0" algn="ctr">
-              <a:buNone/>
-            </a:pPr>
-            <a:r>
-              <a:rPr lang="en-US" sz="1000" b="1" dirty="0">
-                <a:solidFill>
-                  <a:srgbClr val="FFFFFF"/>
-                </a:solidFill>
-                <a:latin typeface="Calibri" pitchFamily="34" charset="0"/>
-                <a:ea typeface="Calibri" pitchFamily="34" charset="-122"/>
-                <a:cs typeface="Calibri" pitchFamily="34" charset="-120"/>
-              </a:rPr>
-              <a:t>500</a:t>
-            </a:r>
-            <a:endParaRPr lang="en-US" sz="1000" dirty="0"/>
-          </a:p>
-        </p:txBody>
-      </p:sp>
-      <p:sp>
-        <p:nvSpPr>
-          <p:cNvPr id="26" name="Text 24"/>
-          <p:cNvSpPr/>
-          <p:nvPr/>
-        </p:nvSpPr>
-        <p:spPr>
-          <a:xfrm>
-            <a:off x="1371600" y="3931920"/>
-            <a:ext cx="7132320" cy="457200"/>
-          </a:xfrm>
-          <a:prstGeom prst="rect">
-            <a:avLst/>
-          </a:prstGeom>
-          <a:noFill/>
-          <a:ln/>
-        </p:spPr>
-        <p:txBody>
-          <a:bodyPr wrap="square" lIns="0" tIns="0" rIns="0" bIns="0" rtlCol="0" anchor="ctr"/>
-          <a:lstStyle/>
-          <a:p>
-            <a:pPr marL="0" indent="0">
-              <a:buNone/>
-            </a:pPr>
-            <a:r>
-              <a:rPr lang="en-US" sz="1300" dirty="0">
-                <a:solidFill>
-                  <a:srgbClr val="E2E8F0"/>
-                </a:solidFill>
-                <a:latin typeface="Calibri" pitchFamily="34" charset="0"/>
-                <a:ea typeface="Calibri" pitchFamily="34" charset="-122"/>
-                <a:cs typeface="Calibri" pitchFamily="34" charset="-120"/>
-              </a:rPr>
-              <a:t>✓  zeigt keine Produkttabelle bei Server-Fehler</a:t>
-            </a:r>
-            <a:endParaRPr lang="en-US" sz="1300" dirty="0"/>
-          </a:p>
-        </p:txBody>
-      </p:sp>
-      <p:sp>
-        <p:nvSpPr>
-          <p:cNvPr id="27" name="Shape 25"/>
-          <p:cNvSpPr/>
-          <p:nvPr/>
-        </p:nvSpPr>
-        <p:spPr>
-          <a:xfrm>
-            <a:off x="457200" y="4572000"/>
-            <a:ext cx="8229600" cy="411480"/>
-          </a:xfrm>
-          <a:prstGeom prst="rect">
-            <a:avLst/>
-          </a:prstGeom>
-          <a:solidFill>
-            <a:srgbClr val="646CFF"/>
-          </a:solidFill>
-          <a:ln/>
-        </p:spPr>
-        <p:txBody>
-          <a:bodyPr/>
-          <a:lstStyle/>
-          <a:p>
-            <a:endParaRPr lang="de-AT"/>
-          </a:p>
-        </p:txBody>
-      </p:sp>
-      <p:sp>
-        <p:nvSpPr>
-          <p:cNvPr id="28" name="Text 26"/>
-          <p:cNvSpPr/>
-          <p:nvPr/>
-        </p:nvSpPr>
-        <p:spPr>
-          <a:xfrm>
-            <a:off x="640080" y="4572000"/>
-            <a:ext cx="7863840" cy="411480"/>
-          </a:xfrm>
-          <a:prstGeom prst="rect">
-            <a:avLst/>
-          </a:prstGeom>
-          <a:noFill/>
-          <a:ln/>
-        </p:spPr>
-        <p:txBody>
-          <a:bodyPr wrap="square" rtlCol="0" anchor="ctr"/>
-          <a:lstStyle/>
-          <a:p>
-            <a:pPr marL="0" indent="0">
-              <a:buNone/>
-            </a:pPr>
-            <a:r>
-              <a:rPr lang="en-US" sz="1300" b="1" dirty="0">
-                <a:solidFill>
-                  <a:srgbClr val="FFFFFF"/>
-                </a:solidFill>
-                <a:latin typeface="Calibri" pitchFamily="34" charset="0"/>
-                <a:ea typeface="Calibri" pitchFamily="34" charset="-122"/>
-                <a:cs typeface="Calibri" pitchFamily="34" charset="-120"/>
-              </a:rPr>
-              <a:t>server.use(errorHandler) → überschreibt Handler temporär für einzelne Tests</a:t>
-            </a:r>
-            <a:endParaRPr lang="en-US" sz="1300" dirty="0"/>
-          </a:p>
-        </p:txBody>
-      </p:sp>
-    </p:spTree>
-  </p:cSld>
-  <p:clrMapOvr>
-    <a:masterClrMapping/>
-  </p:clrMapOvr>
-</p:sld>
-</file>
-
-<file path=ppt/slides/slide12.xml><?xml version="1.0" encoding="utf-8"?>
-<p:sld xmlns:a="http://schemas.openxmlformats.org/drawingml/2006/main" xmlns:r="http://schemas.openxmlformats.org/officeDocument/2006/relationships" xmlns:p="http://schemas.openxmlformats.org/presentationml/2006/main">
   <p:cSld name="Slide 9">
     <p:bg>
       <p:bgPr>
@@ -3893,7 +2945,7 @@
 </p:sld>
 </file>
 
-<file path=ppt/slides/slide13.xml><?xml version="1.0" encoding="utf-8"?>
+<file path=ppt/slides/slide12.xml><?xml version="1.0" encoding="utf-8"?>
 <p:sld xmlns:a="http://schemas.openxmlformats.org/drawingml/2006/main" xmlns:r="http://schemas.openxmlformats.org/officeDocument/2006/relationships" xmlns:p="http://schemas.openxmlformats.org/presentationml/2006/main">
   <p:cSld>
     <p:bg>
@@ -5770,7 +4822,25 @@
                 </a:solidFill>
                 <a:latin typeface="Calibri" pitchFamily="34" charset="0"/>
               </a:rPr>
-              <a:t>MSW nutzt einen Service Worker – eine JavaScript-Datei die als Proxy zwischen Browser und Netzwerk sitzt.</a:t>
+              <a:t>MSW nutzt einen Service </a:t>
+            </a:r>
+            <a:r>
+              <a:rPr lang="de-DE" sz="1400" dirty="0" err="1">
+                <a:solidFill>
+                  <a:srgbClr val="5A6B7B"/>
+                </a:solidFill>
+                <a:latin typeface="Calibri" pitchFamily="34" charset="0"/>
+              </a:rPr>
+              <a:t>Worker</a:t>
+            </a:r>
+            <a:r>
+              <a:rPr lang="de-DE" sz="1400" dirty="0">
+                <a:solidFill>
+                  <a:srgbClr val="5A6B7B"/>
+                </a:solidFill>
+                <a:latin typeface="Calibri" pitchFamily="34" charset="0"/>
+              </a:rPr>
+              <a:t> - eine JavaScript-Datei die als Proxy zwischen Browser und Netzwerk sitzt.</a:t>
             </a:r>
           </a:p>
         </p:txBody>
@@ -6109,7 +5179,25 @@
                 </a:solidFill>
                 <a:latin typeface="Calibri" pitchFamily="34" charset="0"/>
               </a:rPr>
-              <a:t>MSW registriert einen echten Service Worker. Jeder fetch()-Aufruf läuft durch diesen Worker – er kann Anfragen abfangen und ersetzen bevor sie den Server erreichen.</a:t>
+              <a:t>MSW registriert einen echten Service Worker. Jeder fetch()-Aufruf läuft durch diesen </a:t>
+            </a:r>
+            <a:r>
+              <a:rPr lang="de-DE" sz="1200" dirty="0" err="1">
+                <a:solidFill>
+                  <a:srgbClr val="5A6B7B"/>
+                </a:solidFill>
+                <a:latin typeface="Calibri" pitchFamily="34" charset="0"/>
+              </a:rPr>
+              <a:t>Worker</a:t>
+            </a:r>
+            <a:r>
+              <a:rPr lang="de-DE" sz="1200" dirty="0">
+                <a:solidFill>
+                  <a:srgbClr val="5A6B7B"/>
+                </a:solidFill>
+                <a:latin typeface="Calibri" pitchFamily="34" charset="0"/>
+              </a:rPr>
+              <a:t> - er kann Anfragen abfangen und ersetzen bevor sie den Server erreichen.</a:t>
             </a:r>
           </a:p>
         </p:txBody>
@@ -6226,7 +5314,7 @@
                 </a:solidFill>
                 <a:latin typeface="Calibri" pitchFamily="34" charset="0"/>
               </a:rPr>
-              <a:t>Kein Service Worker nötig. MSW hängt sich direkt in den Node.js-Netzwerk-Layer ein. Vitest und Jest nutzen einfach setupServer() – fertig.</a:t>
+              <a:t>Kein Service Worker nötig. MSW hängt sich direkt in den Node.js-Netzwerk-Layer ein. Vitest und Jest nutzen einfach setupServer() - fertig.</a:t>
             </a:r>
           </a:p>
         </p:txBody>
@@ -8397,7 +7485,7 @@
                 <a:ea typeface="Calibri" pitchFamily="34" charset="-122"/>
                 <a:cs typeface="Calibri" pitchFamily="34" charset="-120"/>
               </a:rPr>
-              <a:t>Fängt Anfragen im Service Worker / Node-Interceptor ab – vor dem Netzwerk.</a:t>
+              <a:t>Fängt Anfragen im Service Worker / Node-Interceptor ab - vor dem Netzwerk.</a:t>
             </a:r>
             <a:endParaRPr lang="en-US" sz="1300" dirty="0"/>
           </a:p>
